--- a/pptx-asset-library/decks/01_tables/TBL_bulk_schedule_v1.pptx
+++ b/pptx-asset-library/decks/01_tables/TBL_bulk_schedule_v1.pptx
@@ -3185,7 +3185,7 @@
           <a:graphicData uri="http://schemas.openxmlformats.org/drawingml/2006/table">
             <a:tbl>
               <a:tblPr>
-                <a:tableStyleId>{2D5ABB26-0587-4C30-8999-92F81FD0307C}</a:tableStyleId>
+                <a:tableStyleId>{5C22544A-7EE6-4342-B048-85BDC9FD1C3A}</a:tableStyleId>
               </a:tblPr>
               <a:tblGrid>
                 <a:gridCol w="1554480"/>
@@ -4308,7 +4308,7 @@
           <a:graphicData uri="http://schemas.openxmlformats.org/drawingml/2006/table">
             <a:tbl>
               <a:tblPr>
-                <a:tableStyleId>{2D5ABB26-0587-4C30-8999-92F81FD0307C}</a:tableStyleId>
+                <a:tableStyleId>{5C22544A-7EE6-4342-B048-85BDC9FD1C3A}</a:tableStyleId>
               </a:tblPr>
               <a:tblGrid>
                 <a:gridCol w="1554480"/>
@@ -5627,7 +5627,7 @@
           <a:graphicData uri="http://schemas.openxmlformats.org/drawingml/2006/table">
             <a:tbl>
               <a:tblPr>
-                <a:tableStyleId>{2D5ABB26-0587-4C30-8999-92F81FD0307C}</a:tableStyleId>
+                <a:tableStyleId>{5C22544A-7EE6-4342-B048-85BDC9FD1C3A}</a:tableStyleId>
               </a:tblPr>
               <a:tblGrid>
                 <a:gridCol w="1554480"/>
@@ -6750,7 +6750,7 @@
           <a:graphicData uri="http://schemas.openxmlformats.org/drawingml/2006/table">
             <a:tbl>
               <a:tblPr>
-                <a:tableStyleId>{2D5ABB26-0587-4C30-8999-92F81FD0307C}</a:tableStyleId>
+                <a:tableStyleId>{5C22544A-7EE6-4342-B048-85BDC9FD1C3A}</a:tableStyleId>
               </a:tblPr>
               <a:tblGrid>
                 <a:gridCol w="1554480"/>
@@ -8069,7 +8069,7 @@
           <a:graphicData uri="http://schemas.openxmlformats.org/drawingml/2006/table">
             <a:tbl>
               <a:tblPr>
-                <a:tableStyleId>{2D5ABB26-0587-4C30-8999-92F81FD0307C}</a:tableStyleId>
+                <a:tableStyleId>{5C22544A-7EE6-4342-B048-85BDC9FD1C3A}</a:tableStyleId>
               </a:tblPr>
               <a:tblGrid>
                 <a:gridCol w="1554480"/>
@@ -9192,7 +9192,7 @@
           <a:graphicData uri="http://schemas.openxmlformats.org/drawingml/2006/table">
             <a:tbl>
               <a:tblPr>
-                <a:tableStyleId>{2D5ABB26-0587-4C30-8999-92F81FD0307C}</a:tableStyleId>
+                <a:tableStyleId>{5C22544A-7EE6-4342-B048-85BDC9FD1C3A}</a:tableStyleId>
               </a:tblPr>
               <a:tblGrid>
                 <a:gridCol w="1554480"/>
@@ -10511,7 +10511,7 @@
           <a:graphicData uri="http://schemas.openxmlformats.org/drawingml/2006/table">
             <a:tbl>
               <a:tblPr>
-                <a:tableStyleId>{2D5ABB26-0587-4C30-8999-92F81FD0307C}</a:tableStyleId>
+                <a:tableStyleId>{5C22544A-7EE6-4342-B048-85BDC9FD1C3A}</a:tableStyleId>
               </a:tblPr>
               <a:tblGrid>
                 <a:gridCol w="1554480"/>
@@ -11634,7 +11634,7 @@
           <a:graphicData uri="http://schemas.openxmlformats.org/drawingml/2006/table">
             <a:tbl>
               <a:tblPr>
-                <a:tableStyleId>{2D5ABB26-0587-4C30-8999-92F81FD0307C}</a:tableStyleId>
+                <a:tableStyleId>{5C22544A-7EE6-4342-B048-85BDC9FD1C3A}</a:tableStyleId>
               </a:tblPr>
               <a:tblGrid>
                 <a:gridCol w="1554480"/>
